--- a/DR_Progress_5seeds.pptx
+++ b/DR_Progress_5seeds.pptx
@@ -16,6 +16,7 @@
     <p:sldId id="294" r:id="rId20"/>
     <p:sldId id="292" r:id="rId18"/>
     <p:sldId id="288" r:id="rId7"/>
+    <p:sldId id="310" r:id="rId36"/>
     <p:sldId id="295" r:id="rId21"/>
     <p:sldId id="304" r:id="rId30"/>
     <p:sldId id="305" r:id="rId31"/>
@@ -22258,7 +22259,7 @@
           <a:p>
             <a:r>
               <a:rPr lang="en-US" sz="1100" dirty="0"/>
-              <a:t>6</a:t>
+              <a:t>7</a:t>
             </a:r>
           </a:p>
         </p:txBody>
@@ -23097,7 +23098,7 @@
                 </a:solidFill>
                 <a:latin typeface="Arial"/>
               </a:rPr>
-              <a:t>Early DR (grades 1-2) vs No DR, original run, threshold frozen on validation</a:t>
+              <a:t>A: DDR only. B: DDR + EyePACS, source-balanced. C: old merge. Original run, 3 seeds</a:t>
             </a:r>
           </a:p>
         </p:txBody>
@@ -23132,7 +23133,7 @@
           <a:p>
             <a:r>
               <a:rPr lang="en-US" sz="1100" dirty="0"/>
-              <a:t>7</a:t>
+              <a:t>8</a:t>
             </a:r>
           </a:p>
         </p:txBody>
@@ -23578,7 +23579,7 @@
           <a:p>
             <a:r>
               <a:rPr lang="en-US" sz="1100" dirty="0"/>
-              <a:t>8</a:t>
+              <a:t>9</a:t>
             </a:r>
           </a:p>
         </p:txBody>
@@ -24928,7 +24929,7 @@
                 </a:solidFill>
                 <a:latin typeface="Arial"/>
               </a:rPr>
-              <a:t>Mean and 95% patient-level bootstrap interval over seeds 42 to 46, group-split models.</a:t>
+              <a:t>A = DDR only. B = DDR + all EyePACS, source-balanced. C = DDR + EyePACS grades 1, 3, 4 (old merge). Mean and 95% interval, seeds 42 to 46.</a:t>
             </a:r>
           </a:p>
         </p:txBody>
@@ -25056,7 +25057,7 @@
           <a:p>
             <a:r>
               <a:rPr lang="en-US" sz="1100" dirty="0"/>
-              <a:t>9</a:t>
+              <a:t>10</a:t>
             </a:r>
           </a:p>
         </p:txBody>
@@ -25442,7 +25443,7 @@
           <a:p>
             <a:r>
               <a:rPr lang="en-US" sz="1100" dirty="0"/>
-              <a:t>10</a:t>
+              <a:t>11</a:t>
             </a:r>
           </a:p>
         </p:txBody>
@@ -25846,7 +25847,7 @@
           <a:p>
             <a:r>
               <a:rPr lang="en-US" sz="1100" dirty="0"/>
-              <a:t>11</a:t>
+              <a:t>12</a:t>
             </a:r>
           </a:p>
         </p:txBody>
@@ -26292,7 +26293,7 @@
           <a:p>
             <a:r>
               <a:rPr lang="en-US" sz="1100" dirty="0"/>
-              <a:t>12</a:t>
+              <a:t>13</a:t>
             </a:r>
           </a:p>
         </p:txBody>
@@ -26607,6 +26608,428 @@
                 <a:latin typeface="Arial"/>
               </a:rPr>
               <a:t>5. Write the thesis chapters</a:t>
+            </a:r>
+          </a:p>
+        </p:txBody>
+      </p:sp>
+    </p:spTree>
+  </p:cSld>
+  <p:clrMapOvr>
+    <a:masterClrMapping/>
+  </p:clrMapOvr>
+</p:sld>
+</file>
+
+<file path=ppt/slides/slide29.xml><?xml version="1.0" encoding="utf-8"?>
+<p:sld xmlns:a="http://schemas.openxmlformats.org/drawingml/2006/main" xmlns:r="http://schemas.openxmlformats.org/officeDocument/2006/relationships" xmlns:p="http://schemas.openxmlformats.org/presentationml/2006/main">
+  <p:cSld>
+    <p:spTree>
+      <p:nvGrpSpPr>
+        <p:cNvPr id="1" name=""/>
+        <p:cNvGrpSpPr/>
+        <p:nvPr/>
+      </p:nvGrpSpPr>
+      <p:grpSpPr>
+        <a:xfrm>
+          <a:off x="0" y="0"/>
+          <a:ext cx="0" cy="0"/>
+          <a:chOff x="0" y="0"/>
+          <a:chExt cx="0" cy="0"/>
+        </a:xfrm>
+      </p:grpSpPr>
+      <p:sp>
+        <p:nvSpPr>
+          <p:cNvPr id="2" name="Title 1"/>
+          <p:cNvSpPr>
+            <a:spLocks noGrp="1"/>
+          </p:cNvSpPr>
+          <p:nvPr>
+            <p:ph type="title"/>
+          </p:nvPr>
+        </p:nvSpPr>
+        <p:spPr>
+          <a:xfrm>
+            <a:off x="713232" y="283464"/>
+            <a:ext cx="7909560" cy="502920"/>
+          </a:xfrm>
+        </p:spPr>
+        <p:txBody>
+          <a:bodyPr/>
+          <a:lstStyle/>
+          <a:p>
+            <a:pPr algn="l"/>
+            <a:r>
+              <a:rPr sz="2200" b="1">
+                <a:solidFill>
+                  <a:srgbClr val="121212"/>
+                </a:solidFill>
+                <a:latin typeface="Arial"/>
+              </a:rPr>
+              <a:t>The Three Data Arms</a:t>
+            </a:r>
+          </a:p>
+        </p:txBody>
+      </p:sp>
+      <p:sp>
+        <p:nvSpPr>
+          <p:cNvPr id="3" name="TextBox 2"/>
+          <p:cNvSpPr txBox="1"/>
+          <p:nvPr/>
+        </p:nvSpPr>
+        <p:spPr>
+          <a:xfrm>
+            <a:off x="566928" y="932688"/>
+            <a:ext cx="8138160" cy="256032"/>
+          </a:xfrm>
+          <a:prstGeom prst="rect">
+            <a:avLst/>
+          </a:prstGeom>
+          <a:noFill/>
+        </p:spPr>
+        <p:txBody>
+          <a:bodyPr wrap="square" lIns="27432" tIns="18288" rIns="27432" bIns="18288" anchor="t">
+            <a:spAutoFit/>
+          </a:bodyPr>
+          <a:lstStyle/>
+          <a:p>
+            <a:pPr algn="l"/>
+            <a:r>
+              <a:rPr sz="1480" b="1" i="0">
+                <a:solidFill>
+                  <a:srgbClr val="121212"/>
+                </a:solidFill>
+                <a:latin typeface="Arial"/>
+              </a:rPr>
+              <a:t>Exactly what each arm trains on</a:t>
+            </a:r>
+          </a:p>
+        </p:txBody>
+      </p:sp>
+      <p:sp>
+        <p:nvSpPr>
+          <p:cNvPr id="25" name="TextBox 24">
+            <a:extLst>
+              <a:ext uri="{FF2B5EF4-FFF2-40B4-BE49-F238E27FC236}">
+                <a16:creationId xmlns:a16="http://schemas.microsoft.com/office/drawing/2014/main" id="{6AB72007-F5D0-AF78-B89C-794457398D1F}"/>
+              </a:ext>
+            </a:extLst>
+          </p:cNvPr>
+          <p:cNvSpPr txBox="1"/>
+          <p:nvPr/>
+        </p:nvSpPr>
+        <p:spPr>
+          <a:xfrm>
+            <a:off x="8801100" y="4792436"/>
+            <a:ext cx="342900" cy="261610"/>
+          </a:xfrm>
+          <a:prstGeom prst="rect">
+            <a:avLst/>
+          </a:prstGeom>
+          <a:noFill/>
+        </p:spPr>
+        <p:txBody>
+          <a:bodyPr wrap="square" rtlCol="0">
+            <a:spAutoFit/>
+          </a:bodyPr>
+          <a:lstStyle/>
+          <a:p>
+            <a:r>
+              <a:rPr lang="en-US" sz="1100" dirty="0"/>
+              <a:t>6</a:t>
+            </a:r>
+          </a:p>
+        </p:txBody>
+      </p:sp>
+      <p:sp>
+        <p:nvSpPr>
+          <p:cNvPr id="201" name="Arm 1"/>
+          <p:cNvSpPr/>
+          <p:nvPr/>
+        </p:nvSpPr>
+        <p:spPr>
+          <a:xfrm>
+            <a:off x="502920" y="1280160"/>
+            <a:ext cx="2606040" cy="2926080"/>
+          </a:xfrm>
+          <a:prstGeom prst="roundRect">
+            <a:avLst>
+              <a:gd name="adj" fmla="val 6000"/>
+            </a:avLst>
+          </a:prstGeom>
+          <a:solidFill>
+            <a:srgbClr val="E4ECF6"/>
+          </a:solidFill>
+          <a:ln w="9525">
+            <a:solidFill>
+              <a:srgbClr val="BCCFE4"/>
+            </a:solidFill>
+          </a:ln>
+        </p:spPr>
+        <p:style>
+          <a:lnRef idx="1">
+            <a:schemeClr val="accent1"/>
+          </a:lnRef>
+          <a:fillRef idx="3">
+            <a:schemeClr val="accent1"/>
+          </a:fillRef>
+          <a:effectRef idx="2">
+            <a:schemeClr val="accent1"/>
+          </a:effectRef>
+          <a:fontRef idx="minor">
+            <a:schemeClr val="lt1"/>
+          </a:fontRef>
+        </p:style>
+        <p:txBody>
+          <a:bodyPr wrap="square" lIns="91440" tIns="36576" rIns="91440" bIns="36576" rtlCol="0" anchor="ctr"/>
+          <a:lstStyle/>
+          <a:p>
+            <a:pPr algn="l"/>
+            <a:r>
+              <a:rPr sz="1200" b="1">
+                <a:solidFill>
+                  <a:srgbClr val="121212"/>
+                </a:solidFill>
+                <a:latin typeface="Arial"/>
+              </a:rPr>
+              <a:t>A: DDR only</a:t>
+            </a:r>
+          </a:p>
+          <a:p>
+            <a:pPr algn="l"/>
+            <a:r>
+              <a:rPr sz="1050" b="0">
+                <a:solidFill>
+                  <a:srgbClr val="3a3a3a"/>
+                </a:solidFill>
+                <a:latin typeface="Arial"/>
+              </a:rPr>
+              <a:t>Trained on DDR alone. The clean baseline: it never sees EyePACS.</a:t>
+            </a:r>
+          </a:p>
+          <a:p>
+            <a:pPr algn="l"/>
+            <a:r>
+              <a:rPr sz="1050" b="1">
+                <a:solidFill>
+                  <a:srgbClr val="121212"/>
+                </a:solidFill>
+                <a:latin typeface="Arial"/>
+              </a:rPr>
+              <a:t>Role: baseline</a:t>
+            </a:r>
+          </a:p>
+        </p:txBody>
+      </p:sp>
+      <p:sp>
+        <p:nvSpPr>
+          <p:cNvPr id="202" name="Arm 2"/>
+          <p:cNvSpPr/>
+          <p:nvPr/>
+        </p:nvSpPr>
+        <p:spPr>
+          <a:xfrm>
+            <a:off x="3273552" y="1280160"/>
+            <a:ext cx="2606040" cy="2926080"/>
+          </a:xfrm>
+          <a:prstGeom prst="roundRect">
+            <a:avLst>
+              <a:gd name="adj" fmla="val 6000"/>
+            </a:avLst>
+          </a:prstGeom>
+          <a:solidFill>
+            <a:srgbClr val="E3F2EA"/>
+          </a:solidFill>
+          <a:ln w="9525">
+            <a:solidFill>
+              <a:srgbClr val="1E7A5A"/>
+            </a:solidFill>
+          </a:ln>
+        </p:spPr>
+        <p:style>
+          <a:lnRef idx="1">
+            <a:schemeClr val="accent1"/>
+          </a:lnRef>
+          <a:fillRef idx="3">
+            <a:schemeClr val="accent1"/>
+          </a:fillRef>
+          <a:effectRef idx="2">
+            <a:schemeClr val="accent1"/>
+          </a:effectRef>
+          <a:fontRef idx="minor">
+            <a:schemeClr val="lt1"/>
+          </a:fontRef>
+        </p:style>
+        <p:txBody>
+          <a:bodyPr wrap="square" lIns="91440" tIns="36576" rIns="91440" bIns="36576" rtlCol="0" anchor="ctr"/>
+          <a:lstStyle/>
+          <a:p>
+            <a:pPr algn="l"/>
+            <a:r>
+              <a:rPr sz="1200" b="1">
+                <a:solidFill>
+                  <a:srgbClr val="121212"/>
+                </a:solidFill>
+                <a:latin typeface="Arial"/>
+              </a:rPr>
+              <a:t>B: DDR + all EyePACS, source-balanced</a:t>
+            </a:r>
+          </a:p>
+          <a:p>
+            <a:pPr algn="l"/>
+            <a:r>
+              <a:rPr sz="1050" b="0">
+                <a:solidFill>
+                  <a:srgbClr val="3a3a3a"/>
+                </a:solidFill>
+                <a:latin typeface="Arial"/>
+              </a:rPr>
+              <a:t>All EyePACS grades are added. The sampler makes each source equally likely within every grade, so grade frequencies stay natural.</a:t>
+            </a:r>
+          </a:p>
+          <a:p>
+            <a:pPr algn="l"/>
+            <a:r>
+              <a:rPr sz="1050" b="1">
+                <a:solidFill>
+                  <a:srgbClr val="121212"/>
+                </a:solidFill>
+                <a:latin typeface="Arial"/>
+              </a:rPr>
+              <a:t>Role: does more data help without teaching the source?</a:t>
+            </a:r>
+          </a:p>
+        </p:txBody>
+      </p:sp>
+      <p:sp>
+        <p:nvSpPr>
+          <p:cNvPr id="203" name="Arm 3"/>
+          <p:cNvSpPr/>
+          <p:nvPr/>
+        </p:nvSpPr>
+        <p:spPr>
+          <a:xfrm>
+            <a:off x="6044183" y="1280160"/>
+            <a:ext cx="2606040" cy="2926080"/>
+          </a:xfrm>
+          <a:prstGeom prst="roundRect">
+            <a:avLst>
+              <a:gd name="adj" fmla="val 6000"/>
+            </a:avLst>
+          </a:prstGeom>
+          <a:solidFill>
+            <a:srgbClr val="FFE9D9"/>
+          </a:solidFill>
+          <a:ln w="9525">
+            <a:solidFill>
+              <a:srgbClr val="EB6834"/>
+            </a:solidFill>
+          </a:ln>
+        </p:spPr>
+        <p:style>
+          <a:lnRef idx="1">
+            <a:schemeClr val="accent1"/>
+          </a:lnRef>
+          <a:fillRef idx="3">
+            <a:schemeClr val="accent1"/>
+          </a:fillRef>
+          <a:effectRef idx="2">
+            <a:schemeClr val="accent1"/>
+          </a:effectRef>
+          <a:fontRef idx="minor">
+            <a:schemeClr val="lt1"/>
+          </a:fontRef>
+        </p:style>
+        <p:txBody>
+          <a:bodyPr wrap="square" lIns="91440" tIns="36576" rIns="91440" bIns="36576" rtlCol="0" anchor="ctr"/>
+          <a:lstStyle/>
+          <a:p>
+            <a:pPr algn="l"/>
+            <a:r>
+              <a:rPr sz="1200" b="1">
+                <a:solidFill>
+                  <a:srgbClr val="121212"/>
+                </a:solidFill>
+                <a:latin typeface="Arial"/>
+              </a:rPr>
+              <a:t>C: the old merge (negative control)</a:t>
+            </a:r>
+          </a:p>
+          <a:p>
+            <a:pPr algn="l"/>
+            <a:r>
+              <a:rPr sz="1050" b="0">
+                <a:solidFill>
+                  <a:srgbClr val="3a3a3a"/>
+                </a:solidFill>
+                <a:latin typeface="Arial"/>
+              </a:rPr>
+              <a:t>DDR plus only EyePACS grades 1, 3 and 4: no EyePACS No DR and no grade 2. EyePACS then supplies mostly disease images, so the dataset name predicts disease.</a:t>
+            </a:r>
+          </a:p>
+          <a:p>
+            <a:pPr algn="l"/>
+            <a:r>
+              <a:rPr sz="1050" b="1">
+                <a:solidFill>
+                  <a:srgbClr val="121212"/>
+                </a:solidFill>
+                <a:latin typeface="Arial"/>
+              </a:rPr>
+              <a:t>Role: a deliberately flawed control</a:t>
+            </a:r>
+          </a:p>
+        </p:txBody>
+      </p:sp>
+      <p:sp>
+        <p:nvSpPr>
+          <p:cNvPr id="204" name="Banner"/>
+          <p:cNvSpPr/>
+          <p:nvPr/>
+        </p:nvSpPr>
+        <p:spPr>
+          <a:xfrm>
+            <a:off x="502920" y="4315968"/>
+            <a:ext cx="8138160" cy="365760"/>
+          </a:xfrm>
+          <a:prstGeom prst="roundRect">
+            <a:avLst/>
+          </a:prstGeom>
+          <a:solidFill>
+            <a:srgbClr val="F2F5F8"/>
+          </a:solidFill>
+          <a:ln w="9525">
+            <a:solidFill>
+              <a:srgbClr val="CDD2D7"/>
+            </a:solidFill>
+          </a:ln>
+        </p:spPr>
+        <p:style>
+          <a:lnRef idx="1">
+            <a:schemeClr val="accent1"/>
+          </a:lnRef>
+          <a:fillRef idx="3">
+            <a:schemeClr val="accent1"/>
+          </a:fillRef>
+          <a:effectRef idx="2">
+            <a:schemeClr val="accent1"/>
+          </a:effectRef>
+          <a:fontRef idx="minor">
+            <a:schemeClr val="lt1"/>
+          </a:fontRef>
+        </p:style>
+        <p:txBody>
+          <a:bodyPr wrap="square" lIns="91440" tIns="36576" rIns="91440" bIns="36576" rtlCol="0" anchor="ctr"/>
+          <a:lstStyle/>
+          <a:p>
+            <a:pPr algn="ctr"/>
+            <a:r>
+              <a:rPr sz="1100" b="1">
+                <a:solidFill>
+                  <a:srgbClr val="121212"/>
+                </a:solidFill>
+                <a:latin typeface="Arial"/>
+              </a:rPr>
+              <a:t>Everything else is identical: model, image size, epochs, frozen splits and seeds.</a:t>
             </a:r>
           </a:p>
         </p:txBody>
@@ -27490,7 +27913,7 @@
                 </a:solidFill>
                 <a:latin typeface="Arial"/>
               </a:rPr>
-              <a:t>• B: DDR + EyePACS, source-balanced</a:t>
+              <a:t>• B: DDR + all EyePACS grades, source-balanced</a:t>
             </a:r>
           </a:p>
           <a:p>
@@ -27509,7 +27932,7 @@
                 </a:solidFill>
                 <a:latin typeface="Arial"/>
               </a:rPr>
-              <a:t>• C: version 1 merge (negative control)</a:t>
+              <a:t>• C (control): DDR + EyePACS grades 1, 3, 4 only</a:t>
             </a:r>
           </a:p>
           <a:p>
@@ -27528,7 +27951,7 @@
                 </a:solidFill>
                 <a:latin typeface="Arial"/>
               </a:rPr>
-              <a:t>• C wins on its own test but not on APTOS = it learned the source</a:t>
+              <a:t>• C does well on its own test, not on unseen sources</a:t>
             </a:r>
           </a:p>
         </p:txBody>
